--- a/slides/Chapter 06 - The Texas Court System (Lecture Deck).pptx
+++ b/slides/Chapter 06 - The Texas Court System (Lecture Deck).pptx
@@ -9105,12 +9105,12 @@
         </p:nvSpPr>
         <p:spPr>
           <a:xfrm>
-            <a:off x="594360" y="5806440"/>
-            <a:ext cx="11002975" cy="658368"/>
+            <a:off x="594360" y="5715000"/>
+            <a:ext cx="11002975" cy="749808"/>
           </a:xfrm>
           <a:prstGeom prst="roundRect">
             <a:avLst>
-              <a:gd name="adj" fmla="val 9722"/>
+              <a:gd name="adj" fmla="val 8537"/>
             </a:avLst>
           </a:prstGeom>
           <a:solidFill>
@@ -9132,7 +9132,7 @@
         </p:nvSpPr>
         <p:spPr>
           <a:xfrm>
-            <a:off x="868680" y="5971032"/>
+            <a:off x="868680" y="5879592"/>
             <a:ext cx="10454335" cy="329184"/>
           </a:xfrm>
           <a:prstGeom prst="rect">
@@ -9171,8 +9171,8 @@
         </p:nvSpPr>
         <p:spPr>
           <a:xfrm>
-            <a:off x="868680" y="6336792"/>
-            <a:ext cx="10454335" cy="-54864"/>
+            <a:off x="868680" y="6245352"/>
+            <a:ext cx="10454335" cy="201168"/>
           </a:xfrm>
           <a:prstGeom prst="rect">
             <a:avLst/>

--- a/slides/Chapter 06 - The Texas Court System (Lecture Deck).pptx
+++ b/slides/Chapter 06 - The Texas Court System (Lecture Deck).pptx
@@ -2483,7 +2483,7 @@
                 <a:ea typeface="Calibri" pitchFamily="34" charset="-122"/>
                 <a:cs typeface="Calibri" pitchFamily="34" charset="-120"/>
               </a:rPr>
-              <a:t>Two supreme courts, a thousand trial courts, and judges who run for office with campaign money.</a:t>
+              <a:t>Two supreme courts, nearly three thousand courts, and judges who run for office with campaign money.</a:t>
             </a:r>
             <a:endParaRPr lang="en-US" sz="1600" dirty="0"/>
           </a:p>
@@ -3507,7 +3507,7 @@
                 <a:ea typeface="Calibri" pitchFamily="34" charset="-122"/>
                 <a:cs typeface="Calibri" pitchFamily="34" charset="-120"/>
               </a:rPr>
-              <a:t>From municipal benches to both high courts, Texas judges run in partisan elections, raise campaign money, and appear on the ballot with party labels. Only a handful of states do this for nearly every judicial office.</a:t>
+              <a:t>From justice of the peace courts to both high courts, Texas judges run in partisan elections, raise campaign money, and appear on the ballot with party labels. Only a handful of states do this for nearly every judicial office.</a:t>
             </a:r>
             <a:endParaRPr lang="en-US" sz="1350" dirty="0"/>
           </a:p>
@@ -5411,7 +5411,7 @@
                 <a:ea typeface="Calibri" pitchFamily="34" charset="-122"/>
                 <a:cs typeface="Calibri" pitchFamily="34" charset="-120"/>
               </a:rPr>
-              <a:t>Chapter 6 in the Trailblazer Trek: 8 sections, 1,815 points. Students submit the Completion Report.</a:t>
+              <a:t>Chapter 6 in the Trailblazer Trek: 9 sections, 1,815 points. Students submit the Completion Report.</a:t>
             </a:r>
             <a:endParaRPr lang="en-US" sz="1200" dirty="0"/>
           </a:p>
@@ -11320,7 +11320,7 @@
                 <a:ea typeface="Calibri" pitchFamily="34" charset="-122"/>
                 <a:cs typeface="Calibri" pitchFamily="34" charset="-120"/>
               </a:rPr>
-              <a:t>A justice of the peace courtroom. Texas has more than eight hundred JP courts.</a:t>
+              <a:t>A justice of the peace courtroom. Texas has nearly eight hundred JP courts.</a:t>
             </a:r>
             <a:endParaRPr lang="en-US" sz="1050" dirty="0"/>
           </a:p>

--- a/slides/Chapter 06 - The Texas Court System (Lecture Deck).pptx
+++ b/slides/Chapter 06 - The Texas Court System (Lecture Deck).pptx
@@ -2483,7 +2483,7 @@
                 <a:ea typeface="Calibri" pitchFamily="34" charset="-122"/>
                 <a:cs typeface="Calibri" pitchFamily="34" charset="-120"/>
               </a:rPr>
-              <a:t>Two supreme courts, nearly three thousand courts, and judges who run for office with campaign money.</a:t>
+              <a:t>Two supreme courts, more than 2,800 courts, and judges who run for office with campaign money.</a:t>
             </a:r>
             <a:endParaRPr lang="en-US" sz="1600" dirty="0"/>
           </a:p>
